--- a/assets/brand/decks/audit-the-algorithm-deck.pptx
+++ b/assets/brand/decks/audit-the-algorithm-deck.pptx
@@ -1411,7 +1411,7 @@
       </p:grpSpPr>
       <p:pic>
         <p:nvPicPr>
-          <p:cNvPr id="2" name="Image 0" descr="/tmp/claude-0/-home-user-MalikAI-786-github-io/bd3f9871-f65b-507f-9b3e-375d1ddfe15f/scratchpad/deckassets/mark-ember-on-dark.png">    </p:cNvPr>
+          <p:cNvPr id="2" name="Image 0" descr="/tmp/deckassets/mark-ember-on-dark.png">    </p:cNvPr>
           <p:cNvPicPr>
             <a:picLocks noChangeAspect="1"/>
           </p:cNvPicPr>
@@ -4987,7 +4987,7 @@
       </p:grpSpPr>
       <p:pic>
         <p:nvPicPr>
-          <p:cNvPr id="2" name="Image 0" descr="/tmp/claude-0/-home-user-MalikAI-786-github-io/bd3f9871-f65b-507f-9b3e-375d1ddfe15f/scratchpad/deckassets/mark-ember-on-dark.png">    </p:cNvPr>
+          <p:cNvPr id="2" name="Image 0" descr="/tmp/deckassets/mark-ember-on-dark.png">    </p:cNvPr>
           <p:cNvPicPr>
             <a:picLocks noChangeAspect="1"/>
           </p:cNvPicPr>
@@ -5480,7 +5480,7 @@
                   </a:extLst>
                 </a:hlinkClick>
               </a:rPr>
-              <a:t>proofoverpromise.substack.com</a:t>
+              <a:t>howwouldweknow.substack.com</a:t>
             </a:r>
             <a:endParaRPr lang="en-US" sz="1150" dirty="0"/>
           </a:p>
